--- a/examples/personal-thinking-system/run/slides/s02-question/deliverables/slide.pptx
+++ b/examples/personal-thinking-system/run/slides/s02-question/deliverables/slide.pptx
@@ -503,7 +503,7 @@
             <a:r>
               <a:rPr lang="en-US" dirty="0"/>
               <a:t>[SlidePoise sources]
-Generated target visual: /Users/henry/Codes/AI_slide_drafting/output/showcase-revisions/personal-v2-authoring/slides/s02-question/work/accepted-slide.png</a:t>
+Generated target visual: /Users/henry/Codes/AI_slide_drafting/examples/personal-thinking-system/run/slides/s02-question/work/accepted-slide.png</a:t>
             </a:r>
             <a:endParaRPr lang="en-US" dirty="0"/>
           </a:p>
